--- a/Claude Code 紹介プレゼン_20分版.pptx
+++ b/Claude Code 紹介プレゼン_20分版.pptx
@@ -592,7 +592,7 @@
           <a:lstStyle/>
           <a:p>
             <a:r>
-              <a:t>第4章は“他人の巨大コード”との格闘。前任者が辞め、800ファイル10万行を引き継ぐことに。2時間読んでも全体像はつかめない。そこで『全体構造を説明して』。するとパッケージ構成やAPI一覧が地図のように描かれ、15分で頭に入りました。さらに本番のタイムアウト障害も、スタックトレースを貼るだけで“N+1クエリ”と即特定。1リクエストが裏で大量のクエリを呼ぶ典型バグです。次で実演を見ます。</a:t>
+              <a:t>第4章は“他人の巨大コード”との格闘。前任者が辞め、800ファイル以上・10万行を引き継ぐことに。2時間読んでも全体像はつかめない。そこで『全体構造を説明して』。するとパッケージ構成やAPI一覧が地図のように描かれ、15分で頭に入りました。さらに本番のタイムアウト障害も、スタックトレースを貼るだけで“N+1クエリ”と即特定。1リクエストが裏で大量のクエリを呼ぶ典型バグです。次で実演を見ます。</a:t>
             </a:r>
           </a:p>
         </p:txBody>
@@ -5744,7 +5744,7 @@
                 <a:ea typeface="Yu Gothic"/>
                 <a:cs typeface="Yu Gothic"/>
               </a:rPr>
-              <a:t>前任者は、もういない。800ファイル・10万行の基幹システム。「全体構造を説明して」の一言で、地図が描かれた。</a:t>
+              <a:t>前任者は、もういない。800ファイル以上・10万行の基幹システム。「全体構造を説明して」の一言で、地図が描かれた。</a:t>
             </a:r>
           </a:p>
         </p:txBody>
@@ -28175,7 +28175,28 @@
                 <a:ea typeface="Yu Gothic"/>
                 <a:cs typeface="Yu Gothic"/>
               </a:rPr>
-              <a:t>本番品質にする改善計画を立てて。問題点と優先順位を整理して。</a:t>
+              <a:t>本番品質にする改善計画を立てて。</a:t>
+            </a:r>
+          </a:p>
+          <a:p>
+            <a:pPr algn="l">
+              <a:lnSpc>
+                <a:spcPct val="120000"/>
+              </a:lnSpc>
+              <a:spcBef>
+                <a:spcPts val="0"/>
+              </a:spcBef>
+            </a:pPr>
+            <a:r>
+              <a:rPr sz="1150" b="0" i="0">
+                <a:solidFill>
+                  <a:srgbClr val="E9E9F2"/>
+                </a:solidFill>
+                <a:latin typeface="Yu Gothic"/>
+                <a:ea typeface="Yu Gothic"/>
+                <a:cs typeface="Yu Gothic"/>
+              </a:rPr>
+              <a:t>問題点と優先順位を整理して。</a:t>
             </a:r>
           </a:p>
         </p:txBody>
